--- a/tcc/apresentacao/Apresentacao_TCC.pptx
+++ b/tcc/apresentacao/Apresentacao_TCC.pptx
@@ -12070,7 +12070,7 @@
                 </a:solidFill>
                 <a:latin typeface="Calibri"/>
               </a:rPr>
-              <a:t>Execução de sessões com cronômetro e estimativa de calorias</a:t>
+              <a:t>Execução de sessões com cronômetro</a:t>
             </a:r>
           </a:p>
           <a:p>
